--- a/demo/UPAR_Challenge_Presentation.pptx
+++ b/demo/UPAR_Challenge_Presentation.pptx
@@ -113,25 +113,25 @@
   <p:extLst>
     <p:ext uri="{521415D9-36F7-43E2-AB2F-B90AF26B5E84}">
       <p14:sectionLst xmlns:p14="http://schemas.microsoft.com/office/powerpoint/2010/main">
-        <p14:section name="Intro" id="{1b9002a7-d27e-0be5-4dba-6a5ee0f84e8d}">
+        <p14:section name="Intro" id="{e331cb21-0ab6-b526-8b24-2074dff20a3d}">
           <p14:sldIdLst>
             <p14:sldId id="256"/>
             <p14:sldId id="257"/>
           </p14:sldIdLst>
         </p14:section>
-        <p14:section name="Method" id="{d67b66fe-af93-a3a2-5388-3a624096f203}">
+        <p14:section name="Method" id="{3e5e099a-8d76-e18d-7a0c-6872ef8ceb49}">
           <p14:sldIdLst>
             <p14:sldId id="258"/>
             <p14:sldId id="259"/>
           </p14:sldIdLst>
         </p14:section>
-        <p14:section name="Results" id="{b9598062-7543-3f43-eb74-4bcff6045f53}">
+        <p14:section name="Results" id="{37750a6c-2a1c-c7b2-7201-082042c4e58a}">
           <p14:sldIdLst>
             <p14:sldId id="260"/>
             <p14:sldId id="261"/>
           </p14:sldIdLst>
         </p14:section>
-        <p14:section name="Wrap-up" id="{5acf0749-2db6-0ead-21db-054453196d94}">
+        <p14:section name="Wrap-up" id="{a09de7a8-052e-3f16-2985-f19ef21b6c53}">
           <p14:sldIdLst>
             <p14:sldId id="262"/>
           </p14:sldIdLst>
@@ -556,6 +556,28 @@
             <c:bubble3D val="0"/>
             <c:spPr>
               <a:solidFill>
+                <a:srgbClr val="7FB7BE"/>
+              </a:solidFill>
+              <a:effectLst/>
+            </c:spPr>
+          </c:dPt>
+          <c:dPt>
+            <c:idx val="4"/>
+            <c:invertIfNegative val="0"/>
+            <c:bubble3D val="0"/>
+            <c:spPr>
+              <a:solidFill>
+                <a:srgbClr val="0E7C86"/>
+              </a:solidFill>
+              <a:effectLst/>
+            </c:spPr>
+          </c:dPt>
+          <c:dPt>
+            <c:idx val="5"/>
+            <c:invertIfNegative val="0"/>
+            <c:bubble3D val="0"/>
+            <c:spPr>
+              <a:solidFill>
                 <a:srgbClr val="0E7C86"/>
               </a:solidFill>
               <a:effectLst/>
@@ -563,9 +585,9 @@
           </c:dPt>
           <c:cat>
             <c:multiLvlStrRef>
-              <c:f>Sheet1!$A$2:$A$5</c:f>
+              <c:f>Sheet1!$A$2:$A$7</c:f>
               <c:multiLvlStrCache>
-                <c:ptCount val="4"/>
+                <c:ptCount val="6"/>
                 <c:lvl>
                   <c:pt idx="0">
                     <c:v>Prior baseline</c:v>
@@ -574,10 +596,16 @@
                     <c:v>ConvNeXt-Tiny</c:v>
                   </c:pt>
                   <c:pt idx="2">
-                    <c:v>One CLIP model</c:v>
+                    <c:v>CLIP B/16</c:v>
                   </c:pt>
                   <c:pt idx="3">
-                    <c:v>Three CLIP models</c:v>
+                    <c:v>3 x CLIP B/16</c:v>
+                  </c:pt>
+                  <c:pt idx="4">
+                    <c:v>CLIP L/14</c:v>
+                  </c:pt>
+                  <c:pt idx="5">
+                    <c:v>2 x CLIP L/14</c:v>
                   </c:pt>
                 </c:lvl>
               </c:multiLvlStrCache>
@@ -585,10 +613,10 @@
           </c:cat>
           <c:val>
             <c:numRef>
-              <c:f>Sheet1!$B$2:$B$5</c:f>
+              <c:f>Sheet1!$B$2:$B$7</c:f>
               <c:numCache>
                 <c:formatCode>General</c:formatCode>
-                <c:ptCount val="4"/>
+                <c:ptCount val="6"/>
                 <c:pt idx="0">
                   <c:v>0.4955</c:v>
                 </c:pt>
@@ -600,6 +628,12 @@
                 </c:pt>
                 <c:pt idx="3">
                   <c:v>0.7694</c:v>
+                </c:pt>
+                <c:pt idx="4">
+                  <c:v>0.7788</c:v>
+                </c:pt>
+                <c:pt idx="5">
+                  <c:v>0.7773</c:v>
                 </c:pt>
               </c:numCache>
             </c:numRef>
@@ -660,7 +694,7 @@
           <a:lstStyle/>
           <a:p>
             <a:pPr>
-              <a:defRPr sz="1400" b="0" i="0" u="none" strike="noStrike">
+              <a:defRPr sz="1200" b="0" i="0" u="none" strike="noStrike">
                 <a:solidFill>
                   <a:srgbClr val="0B1F3A"/>
                 </a:solidFill>
@@ -1136,7 +1170,7 @@
           <a:p>
             <a:r>
               <a:rPr lang="en-US" dirty="0"/>
-              <a:t>Hello everyone. Our project is the UPAR Challenge, Track 1, which is about recognising attributes of pedestrians in surveillance images. Our final submission scored 0.7694 on the hidden test set. In the next few minutes I will explain the task, what we found in the data, how we solved it and how the results developed.</a:t>
+              <a:t>Hello everyone. Our project is the UPAR Challenge, Track 1, which is about recognising attributes of pedestrians in surveillance images. Our final submission scored 0.7773 on the hidden test set. In the next few minutes I will explain the task, what we found in the data, how we solved it and how the results developed.</a:t>
             </a:r>
             <a:endParaRPr lang="en-US" dirty="0"/>
           </a:p>
@@ -1400,7 +1434,7 @@
           <a:p>
             <a:r>
               <a:rPr lang="en-US" dirty="0"/>
-              <a:t>Our approach has five steps. We resize every image once and store it, because Colab gives us only about two CPU cores. We augment on the GPU, but never change colours, since colour is one of the labels. We fine-tune CLIP, a model pretrained on images and text, with a gentle learning rate for the early layers. For the final models we also use the validation data, which the rules allow. In the end we average three CLIP models. Everything ran on free Colab GPUs, with three accounts running experiments at the same time.</a:t>
+              <a:t>Our approach has five steps. We resize every image once and store it, because Colab gives us only about two CPU cores. We augment on the GPU, but never change colours, since colour is one of the labels. We fine-tune CLIP, a model pretrained on images and text, with a gentle learning rate for the early layers. We started with the base size and moved to the large one at the end. For the final models we also use the validation data, which the rules allow. In the end we average two CLIP models of the larger L/14 size. Everything ran on free Colab GPUs, with three accounts running experiments at the same time.</a:t>
             </a:r>
             <a:endParaRPr lang="en-US" dirty="0"/>
           </a:p>
@@ -1576,7 +1610,7 @@
           <a:p>
             <a:r>
               <a:rPr lang="en-US" dirty="0"/>
-              <a:t>These are our four Codabench submissions. A baseline that ignores the image scored 0.4955. ConvNeXt-Tiny gave 0.7288. One CLIP model gave 0.7668, and averaging three CLIP models gave 0.7694, which was rank 42 on the leaderboard. The best score there was 0.8021. Things that did not help were longer training, tuning a threshold for each attribute, and adding ConvNeXt to the ensemble.</a:t>
+              <a:t>These are our six Codabench submissions. A baseline that ignores the image scored 0.4955. ConvNeXt-Tiny gave 0.7288. One CLIP model gave 0.7668, and averaging three of them gave 0.7694. Then the large CLIP, ViT-L/14, gave 0.7788 as a single model. Averaging two large models gave 0.7773, which is within noise of the single one. That was our last allowed submission, so 0.7773 is the final score, rank 42 on the leaderboard. The best score there was 0.8021. Things that did not help were longer training, tuning a threshold for each attribute, adding ConvNeXt to the ensemble, and averaging the two large models.</a:t>
             </a:r>
             <a:endParaRPr lang="en-US" dirty="0"/>
           </a:p>
@@ -1664,7 +1698,7 @@
           <a:p>
             <a:r>
               <a:rPr lang="en-US" dirty="0"/>
-              <a:t>To wrap up, there are some limits. Most of our experiments used one random seed, so very small differences are noise, and our held-out test is only a stand-in for the real unseen domain. With more GPU time we would try a larger CLIP model, stronger blur and low-resolution augmentation, and CLIP text prompts. Thank you, and I am happy to take questions.</a:t>
+              <a:t>To wrap up, there are some limits. Most of our experiments used one random seed, so very small differences are noise, and our held-out test is only a stand-in for the real unseen domain. With more GPU time we would train the large CLIP model longer and with more seeds, and try stronger blur and low-resolution augmentation, and CLIP text prompts. Thank you, and I am happy to take questions.</a:t>
             </a:r>
             <a:endParaRPr lang="en-US" dirty="0"/>
           </a:p>
@@ -2573,7 +2607,7 @@
                   <a:schemeClr val="bg1"/>
                 </a:solidFill>
               </a:rPr>
-              <a:t>0.7694</a:t>
+              <a:t>0.7773</a:t>
             </a:r>
             <a:endParaRPr lang="en-US" sz="5400" dirty="0"/>
           </a:p>
@@ -4895,7 +4929,7 @@
                   <a:schemeClr val="tx2"/>
                 </a:solidFill>
               </a:rPr>
-              <a:t>CLIP ViT-B/16 with a gentle learning rate for the early layers and a masked, weighted loss.</a:t>
+              <a:t>CLIP ViT-L/14 (B/16 earlier) with a gentle learning rate for the early layers and a masked, weighted loss.</a:t>
             </a:r>
             <a:endParaRPr lang="en-US" sz="1400" dirty="0"/>
           </a:p>
@@ -5109,7 +5143,7 @@
       </p:sp>
       <p:sp>
         <p:nvSpPr>
-          <p:cNvPr id="26" name="Step card Average three models"/>
+          <p:cNvPr id="26" name="Step card Average two models"/>
           <p:cNvSpPr/>
           <p:nvPr/>
         </p:nvSpPr>
@@ -5159,7 +5193,7 @@
                   <a:schemeClr val="tx1"/>
                 </a:solidFill>
               </a:rPr>
-              <a:t>Average three models</a:t>
+              <a:t>Average two models</a:t>
             </a:r>
             <a:endParaRPr lang="en-US" sz="1800" dirty="0"/>
           </a:p>
@@ -5195,7 +5229,7 @@
                   <a:schemeClr val="tx2"/>
                 </a:solidFill>
               </a:rPr>
-              <a:t>Three CLIP models are averaged and cut at the fixed 0.5 threshold.</a:t>
+              <a:t>Two CLIP L/14 models are averaged and cut at the fixed 0.5 threshold.</a:t>
             </a:r>
             <a:endParaRPr lang="en-US" sz="1400" dirty="0"/>
           </a:p>
@@ -5733,7 +5767,7 @@
                   <a:schemeClr val="tx1"/>
                 </a:solidFill>
               </a:rPr>
-              <a:t>On the leaderboard: from 0.50 to 0.77</a:t>
+              <a:t>On the leaderboard: from 0.50 to 0.78</a:t>
             </a:r>
             <a:endParaRPr lang="en-US" sz="3400" dirty="0"/>
           </a:p>
@@ -5785,7 +5819,7 @@
                   <a:schemeClr val="tx2"/>
                 </a:solidFill>
               </a:rPr>
-              <a:t>Challenge_Avg on the hidden test set, one Codabench submission each.</a:t>
+              <a:t>Challenge_Avg on the hidden test set, one Codabench submission each. The 2 x L/14 bar is the final submission.</a:t>
             </a:r>
             <a:endParaRPr lang="en-US" sz="1200" dirty="0"/>
           </a:p>
@@ -6014,6 +6048,24 @@
                 </a:solidFill>
               </a:rPr>
               <a:t>Mixing ConvNeXt into the ensemble</a:t>
+            </a:r>
+            <a:endParaRPr lang="en-US" sz="1400" dirty="0"/>
+          </a:p>
+          <a:p>
+            <a:pPr marL="342900" indent="-342900">
+              <a:spcAft>
+                <a:spcPts val="600"/>
+              </a:spcAft>
+              <a:buSzPct val="100000"/>
+              <a:buChar char="•"/>
+            </a:pPr>
+            <a:r>
+              <a:rPr lang="en-US" sz="1400" dirty="0">
+                <a:solidFill>
+                  <a:schemeClr val="tx2"/>
+                </a:solidFill>
+              </a:rPr>
+              <a:t>Averaging two L/14 models</a:t>
             </a:r>
             <a:endParaRPr lang="en-US" sz="1400" dirty="0"/>
           </a:p>
@@ -6353,7 +6405,7 @@
                   <a:schemeClr val="bg1"/>
                 </a:solidFill>
               </a:rPr>
-              <a:t>A larger CLIP (ViT-L/14), which did not fit our GPU time.</a:t>
+              <a:t>Longer training and more seeds for ViT-L/14, which only got 3 to 4 epochs on a T4.</a:t>
             </a:r>
             <a:endParaRPr lang="en-US" sz="1800" dirty="0"/>
           </a:p>
